--- a/20260331_연세대_수치양자역학강의.pptx
+++ b/20260331_연세대_수치양자역학강의.pptx
@@ -7,8 +7,8 @@
   <p:sldIdLst>
     <p:sldId id="286" r:id="rId2"/>
     <p:sldId id="306" r:id="rId3"/>
-    <p:sldId id="290" r:id="rId4"/>
-    <p:sldId id="291" r:id="rId5"/>
+    <p:sldId id="291" r:id="rId4"/>
+    <p:sldId id="290" r:id="rId5"/>
     <p:sldId id="296" r:id="rId6"/>
     <p:sldId id="308" r:id="rId7"/>
     <p:sldId id="292" r:id="rId8"/>
@@ -311,7 +311,7 @@
           <a:p>
             <a:fld id="{916B85E3-3F26-4931-9378-98579BCCDB13}" type="datetimeFigureOut">
               <a:rPr lang="ko-KR" altLang="en-US" smtClean="0"/>
-              <a:t>2026-03-24</a:t>
+              <a:t>2026-03-30</a:t>
             </a:fld>
             <a:endParaRPr lang="ko-KR" altLang="en-US"/>
           </a:p>
@@ -509,7 +509,7 @@
           <a:p>
             <a:fld id="{916B85E3-3F26-4931-9378-98579BCCDB13}" type="datetimeFigureOut">
               <a:rPr lang="ko-KR" altLang="en-US" smtClean="0"/>
-              <a:t>2026-03-24</a:t>
+              <a:t>2026-03-30</a:t>
             </a:fld>
             <a:endParaRPr lang="ko-KR" altLang="en-US"/>
           </a:p>
@@ -717,7 +717,7 @@
           <a:p>
             <a:fld id="{916B85E3-3F26-4931-9378-98579BCCDB13}" type="datetimeFigureOut">
               <a:rPr lang="ko-KR" altLang="en-US" smtClean="0"/>
-              <a:t>2026-03-24</a:t>
+              <a:t>2026-03-30</a:t>
             </a:fld>
             <a:endParaRPr lang="ko-KR" altLang="en-US"/>
           </a:p>
@@ -915,7 +915,7 @@
           <a:p>
             <a:fld id="{916B85E3-3F26-4931-9378-98579BCCDB13}" type="datetimeFigureOut">
               <a:rPr lang="ko-KR" altLang="en-US" smtClean="0"/>
-              <a:t>2026-03-24</a:t>
+              <a:t>2026-03-30</a:t>
             </a:fld>
             <a:endParaRPr lang="ko-KR" altLang="en-US"/>
           </a:p>
@@ -1190,7 +1190,7 @@
           <a:p>
             <a:fld id="{916B85E3-3F26-4931-9378-98579BCCDB13}" type="datetimeFigureOut">
               <a:rPr lang="ko-KR" altLang="en-US" smtClean="0"/>
-              <a:t>2026-03-24</a:t>
+              <a:t>2026-03-30</a:t>
             </a:fld>
             <a:endParaRPr lang="ko-KR" altLang="en-US"/>
           </a:p>
@@ -1455,7 +1455,7 @@
           <a:p>
             <a:fld id="{916B85E3-3F26-4931-9378-98579BCCDB13}" type="datetimeFigureOut">
               <a:rPr lang="ko-KR" altLang="en-US" smtClean="0"/>
-              <a:t>2026-03-24</a:t>
+              <a:t>2026-03-30</a:t>
             </a:fld>
             <a:endParaRPr lang="ko-KR" altLang="en-US"/>
           </a:p>
@@ -1867,7 +1867,7 @@
           <a:p>
             <a:fld id="{916B85E3-3F26-4931-9378-98579BCCDB13}" type="datetimeFigureOut">
               <a:rPr lang="ko-KR" altLang="en-US" smtClean="0"/>
-              <a:t>2026-03-24</a:t>
+              <a:t>2026-03-30</a:t>
             </a:fld>
             <a:endParaRPr lang="ko-KR" altLang="en-US"/>
           </a:p>
@@ -2008,7 +2008,7 @@
           <a:p>
             <a:fld id="{916B85E3-3F26-4931-9378-98579BCCDB13}" type="datetimeFigureOut">
               <a:rPr lang="ko-KR" altLang="en-US" smtClean="0"/>
-              <a:t>2026-03-24</a:t>
+              <a:t>2026-03-30</a:t>
             </a:fld>
             <a:endParaRPr lang="ko-KR" altLang="en-US"/>
           </a:p>
@@ -2121,7 +2121,7 @@
           <a:p>
             <a:fld id="{916B85E3-3F26-4931-9378-98579BCCDB13}" type="datetimeFigureOut">
               <a:rPr lang="ko-KR" altLang="en-US" smtClean="0"/>
-              <a:t>2026-03-24</a:t>
+              <a:t>2026-03-30</a:t>
             </a:fld>
             <a:endParaRPr lang="ko-KR" altLang="en-US"/>
           </a:p>
@@ -2432,7 +2432,7 @@
           <a:p>
             <a:fld id="{916B85E3-3F26-4931-9378-98579BCCDB13}" type="datetimeFigureOut">
               <a:rPr lang="ko-KR" altLang="en-US" smtClean="0"/>
-              <a:t>2026-03-24</a:t>
+              <a:t>2026-03-30</a:t>
             </a:fld>
             <a:endParaRPr lang="ko-KR" altLang="en-US"/>
           </a:p>
@@ -2720,7 +2720,7 @@
           <a:p>
             <a:fld id="{916B85E3-3F26-4931-9378-98579BCCDB13}" type="datetimeFigureOut">
               <a:rPr lang="ko-KR" altLang="en-US" smtClean="0"/>
-              <a:t>2026-03-24</a:t>
+              <a:t>2026-03-30</a:t>
             </a:fld>
             <a:endParaRPr lang="ko-KR" altLang="en-US"/>
           </a:p>
@@ -2961,7 +2961,7 @@
           <a:p>
             <a:fld id="{916B85E3-3F26-4931-9378-98579BCCDB13}" type="datetimeFigureOut">
               <a:rPr lang="ko-KR" altLang="en-US" smtClean="0"/>
-              <a:t>2026-03-24</a:t>
+              <a:t>2026-03-30</a:t>
             </a:fld>
             <a:endParaRPr lang="ko-KR" altLang="en-US"/>
           </a:p>
@@ -14365,7 +14365,7 @@
                 <a:ea typeface="SUIT SemiBold" pitchFamily="50" charset="-127"/>
                 <a:cs typeface="Pretendard Medium" panose="02000603000000020004" pitchFamily="50" charset="-127"/>
               </a:rPr>
-              <a:t>Introduction</a:t>
+              <a:t>Types of Nuclear Reactions</a:t>
             </a:r>
             <a:endParaRPr lang="ko-KR" altLang="en-US" sz="2400" dirty="0">
               <a:solidFill>
@@ -14421,8 +14421,8 @@
         </p:nvSpPr>
         <p:spPr>
           <a:xfrm>
-            <a:off x="427462" y="1220145"/>
-            <a:ext cx="11764538" cy="1791260"/>
+            <a:off x="427462" y="1220144"/>
+            <a:ext cx="5668538" cy="3933384"/>
           </a:xfrm>
           <a:prstGeom prst="rect">
             <a:avLst/>
@@ -14452,13 +14452,12 @@
                 </a:solidFill>
                 <a:latin typeface="Arial"/>
                 <a:ea typeface="돋움" panose="020B0600000101010101" pitchFamily="50" charset="-127"/>
-                <a:sym typeface="Wingdings" panose="05000000000000000000" pitchFamily="2" charset="2"/>
               </a:rPr>
-              <a:t>How to relate it with quantum theory? </a:t>
-            </a:r>
-          </a:p>
-          <a:p>
-            <a:pPr marL="182880" lvl="0" indent="-182880" latinLnBrk="0">
+              <a:t>Types of nuclear reaction</a:t>
+            </a:r>
+          </a:p>
+          <a:p>
+            <a:pPr marL="640080" lvl="1" indent="-182880" latinLnBrk="0">
               <a:spcBef>
                 <a:spcPct val="20000"/>
               </a:spcBef>
@@ -14472,17 +14471,16 @@
             <a:r>
               <a:rPr lang="en-US" altLang="ko-KR" sz="2400" dirty="0">
                 <a:solidFill>
-                  <a:srgbClr val="292934"/>
+                  <a:srgbClr val="FF0000"/>
                 </a:solidFill>
                 <a:latin typeface="Arial"/>
                 <a:ea typeface="돋움" panose="020B0600000101010101" pitchFamily="50" charset="-127"/>
-                <a:sym typeface="Wingdings" panose="05000000000000000000" pitchFamily="2" charset="2"/>
               </a:rPr>
-              <a:t> The distribution of the products will be determined from the wave function</a:t>
-            </a:r>
-          </a:p>
-          <a:p>
-            <a:pPr marL="182880" lvl="0" indent="-182880" latinLnBrk="0">
+              <a:t>Elastic scattering</a:t>
+            </a:r>
+          </a:p>
+          <a:p>
+            <a:pPr marL="640080" lvl="1" indent="-182880" latinLnBrk="0">
               <a:spcBef>
                 <a:spcPct val="20000"/>
               </a:spcBef>
@@ -14500,20 +14498,79 @@
                 </a:solidFill>
                 <a:latin typeface="Arial"/>
                 <a:ea typeface="돋움" panose="020B0600000101010101" pitchFamily="50" charset="-127"/>
-                <a:sym typeface="Wingdings" panose="05000000000000000000" pitchFamily="2" charset="2"/>
               </a:rPr>
-              <a:t> Solve Schrödinger equation </a:t>
-            </a:r>
-            <a:endParaRPr lang="en-US" altLang="ko-KR" sz="2400" dirty="0">
-              <a:solidFill>
-                <a:srgbClr val="292934"/>
-              </a:solidFill>
-              <a:latin typeface="Arial"/>
-              <a:ea typeface="돋움" panose="020B0600000101010101" pitchFamily="50" charset="-127"/>
-            </a:endParaRPr>
-          </a:p>
-          <a:p>
-            <a:pPr marL="182880" lvl="0" indent="-182880" latinLnBrk="0">
+              <a:t>Non-Elastic scattering</a:t>
+            </a:r>
+          </a:p>
+          <a:p>
+            <a:pPr marL="1097280" lvl="2" indent="-182880" latinLnBrk="0">
+              <a:spcBef>
+                <a:spcPct val="20000"/>
+              </a:spcBef>
+              <a:buClr>
+                <a:srgbClr val="93A299"/>
+              </a:buClr>
+              <a:buSzPct val="85000"/>
+              <a:buFont typeface="Arial" pitchFamily="34" charset="0"/>
+              <a:buChar char="•"/>
+            </a:pPr>
+            <a:r>
+              <a:rPr lang="en-US" altLang="ko-KR" sz="2400" dirty="0">
+                <a:solidFill>
+                  <a:srgbClr val="292934"/>
+                </a:solidFill>
+                <a:latin typeface="Arial"/>
+                <a:ea typeface="돋움" panose="020B0600000101010101" pitchFamily="50" charset="-127"/>
+              </a:rPr>
+              <a:t>Inelastic scattering</a:t>
+            </a:r>
+          </a:p>
+          <a:p>
+            <a:pPr marL="1097280" lvl="2" indent="-182880" latinLnBrk="0">
+              <a:spcBef>
+                <a:spcPct val="20000"/>
+              </a:spcBef>
+              <a:buClr>
+                <a:srgbClr val="93A299"/>
+              </a:buClr>
+              <a:buSzPct val="85000"/>
+              <a:buFont typeface="Arial" pitchFamily="34" charset="0"/>
+              <a:buChar char="•"/>
+            </a:pPr>
+            <a:r>
+              <a:rPr lang="en-US" altLang="ko-KR" sz="2400" dirty="0">
+                <a:solidFill>
+                  <a:srgbClr val="292934"/>
+                </a:solidFill>
+                <a:latin typeface="Arial"/>
+                <a:ea typeface="돋움" panose="020B0600000101010101" pitchFamily="50" charset="-127"/>
+              </a:rPr>
+              <a:t>Rearrangement reactions</a:t>
+            </a:r>
+          </a:p>
+          <a:p>
+            <a:pPr lvl="2" latinLnBrk="0">
+              <a:spcBef>
+                <a:spcPct val="20000"/>
+              </a:spcBef>
+              <a:buClr>
+                <a:srgbClr val="93A299"/>
+              </a:buClr>
+              <a:buSzPct val="85000"/>
+            </a:pPr>
+            <a:r>
+              <a:rPr lang="en-US" altLang="ko-KR" sz="2400" dirty="0">
+                <a:solidFill>
+                  <a:srgbClr val="292934"/>
+                </a:solidFill>
+                <a:latin typeface="Arial"/>
+                <a:ea typeface="돋움" panose="020B0600000101010101" pitchFamily="50" charset="-127"/>
+              </a:rPr>
+              <a:t>   (transfer, knock out, fusion, fission …)</a:t>
+            </a:r>
+          </a:p>
+          <a:p>
+            <a:pPr marL="1097280" lvl="2" indent="-182880" latinLnBrk="0">
               <a:spcBef>
                 <a:spcPct val="20000"/>
               </a:spcBef>
@@ -14532,14 +14589,44 @@
               <a:ea typeface="돋움" panose="020B0600000101010101" pitchFamily="50" charset="-127"/>
             </a:endParaRPr>
           </a:p>
+          <a:p>
+            <a:pPr marL="182880" lvl="0" indent="-182880" latinLnBrk="0">
+              <a:spcBef>
+                <a:spcPct val="20000"/>
+              </a:spcBef>
+              <a:buClr>
+                <a:srgbClr val="93A299"/>
+              </a:buClr>
+              <a:buSzPct val="85000"/>
+              <a:buFont typeface="Arial" pitchFamily="34" charset="0"/>
+              <a:buChar char="•"/>
+            </a:pPr>
+            <a:r>
+              <a:rPr lang="en-US" altLang="ko-KR" sz="2400" dirty="0">
+                <a:solidFill>
+                  <a:srgbClr val="FF0000"/>
+                </a:solidFill>
+                <a:ea typeface="돋움" panose="020B0600000101010101" pitchFamily="50" charset="-127"/>
+                <a:sym typeface="Wingdings" panose="05000000000000000000" pitchFamily="2" charset="2"/>
+              </a:rPr>
+              <a:t> we focus on elastic scattering here. </a:t>
+            </a:r>
+            <a:endParaRPr lang="en-US" altLang="ko-KR" sz="2400" dirty="0">
+              <a:solidFill>
+                <a:srgbClr val="292934"/>
+              </a:solidFill>
+              <a:latin typeface="Arial"/>
+              <a:ea typeface="돋움" panose="020B0600000101010101" pitchFamily="50" charset="-127"/>
+            </a:endParaRPr>
+          </a:p>
         </p:txBody>
       </p:sp>
       <p:pic>
         <p:nvPicPr>
-          <p:cNvPr id="9" name="그림 8">
-            <a:extLst>
-              <a:ext uri="{FF2B5EF4-FFF2-40B4-BE49-F238E27FC236}">
-                <a16:creationId xmlns:a16="http://schemas.microsoft.com/office/drawing/2014/main" id="{72EA36EF-8B9E-4817-A85C-A9049684B753}"/>
+          <p:cNvPr id="6" name="그림 5">
+            <a:extLst>
+              <a:ext uri="{FF2B5EF4-FFF2-40B4-BE49-F238E27FC236}">
+                <a16:creationId xmlns:a16="http://schemas.microsoft.com/office/drawing/2014/main" id="{5807920B-F1CA-49E9-AA7E-922112FBAB2F}"/>
               </a:ext>
             </a:extLst>
           </p:cNvPr>
@@ -14556,8 +14643,8 @@
         </p:blipFill>
         <p:spPr>
           <a:xfrm>
-            <a:off x="6309731" y="2111717"/>
-            <a:ext cx="4057284" cy="2222956"/>
+            <a:off x="5991483" y="1520040"/>
+            <a:ext cx="5806322" cy="3687580"/>
           </a:xfrm>
           <a:prstGeom prst="rect">
             <a:avLst/>
@@ -14566,10 +14653,10 @@
       </p:pic>
       <p:pic>
         <p:nvPicPr>
-          <p:cNvPr id="10" name="그림 9">
-            <a:extLst>
-              <a:ext uri="{FF2B5EF4-FFF2-40B4-BE49-F238E27FC236}">
-                <a16:creationId xmlns:a16="http://schemas.microsoft.com/office/drawing/2014/main" id="{7743E98F-D255-419E-A584-F7B5CD801FE8}"/>
+          <p:cNvPr id="2" name="그림 1">
+            <a:extLst>
+              <a:ext uri="{FF2B5EF4-FFF2-40B4-BE49-F238E27FC236}">
+                <a16:creationId xmlns:a16="http://schemas.microsoft.com/office/drawing/2014/main" id="{740F7BC3-EA65-4615-8648-3E9EE41DD295}"/>
               </a:ext>
             </a:extLst>
           </p:cNvPr>
@@ -14586,65 +14673,18 @@
         </p:blipFill>
         <p:spPr>
           <a:xfrm>
-            <a:off x="974923" y="3223195"/>
-            <a:ext cx="4344006" cy="866896"/>
+            <a:off x="6727259" y="5139442"/>
+            <a:ext cx="4134030" cy="1459533"/>
           </a:xfrm>
           <a:prstGeom prst="rect">
             <a:avLst/>
           </a:prstGeom>
         </p:spPr>
       </p:pic>
-      <p:sp>
-        <p:nvSpPr>
-          <p:cNvPr id="2" name="TextBox 1">
-            <a:extLst>
-              <a:ext uri="{FF2B5EF4-FFF2-40B4-BE49-F238E27FC236}">
-                <a16:creationId xmlns:a16="http://schemas.microsoft.com/office/drawing/2014/main" id="{3BA95C2C-5026-4851-9C43-D7402446C999}"/>
-              </a:ext>
-            </a:extLst>
-          </p:cNvPr>
-          <p:cNvSpPr txBox="1"/>
-          <p:nvPr/>
-        </p:nvSpPr>
-        <p:spPr>
-          <a:xfrm>
-            <a:off x="923570" y="4958074"/>
-            <a:ext cx="9201737" cy="646331"/>
-          </a:xfrm>
-          <a:prstGeom prst="rect">
-            <a:avLst/>
-          </a:prstGeom>
-          <a:noFill/>
-        </p:spPr>
-        <p:txBody>
-          <a:bodyPr wrap="square" rtlCol="0">
-            <a:spAutoFit/>
-          </a:bodyPr>
-          <a:lstStyle/>
-          <a:p>
-            <a:r>
-              <a:rPr lang="en-US" dirty="0"/>
-              <a:t>Compare with experiments</a:t>
-            </a:r>
-          </a:p>
-          <a:p>
-            <a:r>
-              <a:rPr lang="en-US" dirty="0">
-                <a:sym typeface="Wingdings" panose="05000000000000000000" pitchFamily="2" charset="2"/>
-              </a:rPr>
-              <a:t> </a:t>
-            </a:r>
-            <a:r>
-              <a:rPr lang="en-US" dirty="0"/>
-              <a:t>What kind of interaction and states(structure) describes the experiments best?</a:t>
-            </a:r>
-          </a:p>
-        </p:txBody>
-      </p:sp>
     </p:spTree>
     <p:extLst>
       <p:ext uri="{BB962C8B-B14F-4D97-AF65-F5344CB8AC3E}">
-        <p14:creationId xmlns:p14="http://schemas.microsoft.com/office/powerpoint/2010/main" val="2305429575"/>
+        <p14:creationId xmlns:p14="http://schemas.microsoft.com/office/powerpoint/2010/main" val="89010064"/>
       </p:ext>
     </p:extLst>
   </p:cSld>
@@ -18681,7 +18721,7 @@
                 <a:ea typeface="SUIT SemiBold" pitchFamily="50" charset="-127"/>
                 <a:cs typeface="Pretendard Medium" panose="02000603000000020004" pitchFamily="50" charset="-127"/>
               </a:rPr>
-              <a:t>Types of Nuclear Reactions</a:t>
+              <a:t>Introduction</a:t>
             </a:r>
             <a:endParaRPr lang="ko-KR" altLang="en-US" sz="2400" dirty="0">
               <a:solidFill>
@@ -18737,8 +18777,8 @@
         </p:nvSpPr>
         <p:spPr>
           <a:xfrm>
-            <a:off x="427462" y="1220144"/>
-            <a:ext cx="5668538" cy="3933384"/>
+            <a:off x="427462" y="1220145"/>
+            <a:ext cx="11764538" cy="1791260"/>
           </a:xfrm>
           <a:prstGeom prst="rect">
             <a:avLst/>
@@ -18768,12 +18808,13 @@
                 </a:solidFill>
                 <a:latin typeface="Arial"/>
                 <a:ea typeface="돋움" panose="020B0600000101010101" pitchFamily="50" charset="-127"/>
+                <a:sym typeface="Wingdings" panose="05000000000000000000" pitchFamily="2" charset="2"/>
               </a:rPr>
-              <a:t>Types of nuclear reaction</a:t>
-            </a:r>
-          </a:p>
-          <a:p>
-            <a:pPr marL="640080" lvl="1" indent="-182880" latinLnBrk="0">
+              <a:t>How to relate it with quantum theory? </a:t>
+            </a:r>
+          </a:p>
+          <a:p>
+            <a:pPr marL="182880" lvl="0" indent="-182880" latinLnBrk="0">
               <a:spcBef>
                 <a:spcPct val="20000"/>
               </a:spcBef>
@@ -18787,16 +18828,17 @@
             <a:r>
               <a:rPr lang="en-US" altLang="ko-KR" sz="2400" dirty="0">
                 <a:solidFill>
-                  <a:srgbClr val="FF0000"/>
+                  <a:srgbClr val="292934"/>
                 </a:solidFill>
                 <a:latin typeface="Arial"/>
                 <a:ea typeface="돋움" panose="020B0600000101010101" pitchFamily="50" charset="-127"/>
+                <a:sym typeface="Wingdings" panose="05000000000000000000" pitchFamily="2" charset="2"/>
               </a:rPr>
-              <a:t>Elastic scattering</a:t>
-            </a:r>
-          </a:p>
-          <a:p>
-            <a:pPr marL="640080" lvl="1" indent="-182880" latinLnBrk="0">
+              <a:t> The distribution of the products will be determined from the wave function</a:t>
+            </a:r>
+          </a:p>
+          <a:p>
+            <a:pPr marL="182880" lvl="0" indent="-182880" latinLnBrk="0">
               <a:spcBef>
                 <a:spcPct val="20000"/>
               </a:spcBef>
@@ -18814,79 +18856,20 @@
                 </a:solidFill>
                 <a:latin typeface="Arial"/>
                 <a:ea typeface="돋움" panose="020B0600000101010101" pitchFamily="50" charset="-127"/>
+                <a:sym typeface="Wingdings" panose="05000000000000000000" pitchFamily="2" charset="2"/>
               </a:rPr>
-              <a:t>Non-Elastic scattering</a:t>
-            </a:r>
-          </a:p>
-          <a:p>
-            <a:pPr marL="1097280" lvl="2" indent="-182880" latinLnBrk="0">
-              <a:spcBef>
-                <a:spcPct val="20000"/>
-              </a:spcBef>
-              <a:buClr>
-                <a:srgbClr val="93A299"/>
-              </a:buClr>
-              <a:buSzPct val="85000"/>
-              <a:buFont typeface="Arial" pitchFamily="34" charset="0"/>
-              <a:buChar char="•"/>
-            </a:pPr>
-            <a:r>
-              <a:rPr lang="en-US" altLang="ko-KR" sz="2400" dirty="0">
-                <a:solidFill>
-                  <a:srgbClr val="292934"/>
-                </a:solidFill>
-                <a:latin typeface="Arial"/>
-                <a:ea typeface="돋움" panose="020B0600000101010101" pitchFamily="50" charset="-127"/>
-              </a:rPr>
-              <a:t>Inelastic scattering</a:t>
-            </a:r>
-          </a:p>
-          <a:p>
-            <a:pPr marL="1097280" lvl="2" indent="-182880" latinLnBrk="0">
-              <a:spcBef>
-                <a:spcPct val="20000"/>
-              </a:spcBef>
-              <a:buClr>
-                <a:srgbClr val="93A299"/>
-              </a:buClr>
-              <a:buSzPct val="85000"/>
-              <a:buFont typeface="Arial" pitchFamily="34" charset="0"/>
-              <a:buChar char="•"/>
-            </a:pPr>
-            <a:r>
-              <a:rPr lang="en-US" altLang="ko-KR" sz="2400" dirty="0">
-                <a:solidFill>
-                  <a:srgbClr val="292934"/>
-                </a:solidFill>
-                <a:latin typeface="Arial"/>
-                <a:ea typeface="돋움" panose="020B0600000101010101" pitchFamily="50" charset="-127"/>
-              </a:rPr>
-              <a:t>Rearrangement reactions</a:t>
-            </a:r>
-          </a:p>
-          <a:p>
-            <a:pPr lvl="2" latinLnBrk="0">
-              <a:spcBef>
-                <a:spcPct val="20000"/>
-              </a:spcBef>
-              <a:buClr>
-                <a:srgbClr val="93A299"/>
-              </a:buClr>
-              <a:buSzPct val="85000"/>
-            </a:pPr>
-            <a:r>
-              <a:rPr lang="en-US" altLang="ko-KR" sz="2400" dirty="0">
-                <a:solidFill>
-                  <a:srgbClr val="292934"/>
-                </a:solidFill>
-                <a:latin typeface="Arial"/>
-                <a:ea typeface="돋움" panose="020B0600000101010101" pitchFamily="50" charset="-127"/>
-              </a:rPr>
-              <a:t>   (transfer, knock out, fusion, fission …)</a:t>
-            </a:r>
-          </a:p>
-          <a:p>
-            <a:pPr marL="1097280" lvl="2" indent="-182880" latinLnBrk="0">
+              <a:t> Solve Schrödinger equation </a:t>
+            </a:r>
+            <a:endParaRPr lang="en-US" altLang="ko-KR" sz="2400" dirty="0">
+              <a:solidFill>
+                <a:srgbClr val="292934"/>
+              </a:solidFill>
+              <a:latin typeface="Arial"/>
+              <a:ea typeface="돋움" panose="020B0600000101010101" pitchFamily="50" charset="-127"/>
+            </a:endParaRPr>
+          </a:p>
+          <a:p>
+            <a:pPr marL="182880" lvl="0" indent="-182880" latinLnBrk="0">
               <a:spcBef>
                 <a:spcPct val="20000"/>
               </a:spcBef>
@@ -18905,44 +18888,14 @@
               <a:ea typeface="돋움" panose="020B0600000101010101" pitchFamily="50" charset="-127"/>
             </a:endParaRPr>
           </a:p>
-          <a:p>
-            <a:pPr marL="182880" lvl="0" indent="-182880" latinLnBrk="0">
-              <a:spcBef>
-                <a:spcPct val="20000"/>
-              </a:spcBef>
-              <a:buClr>
-                <a:srgbClr val="93A299"/>
-              </a:buClr>
-              <a:buSzPct val="85000"/>
-              <a:buFont typeface="Arial" pitchFamily="34" charset="0"/>
-              <a:buChar char="•"/>
-            </a:pPr>
-            <a:r>
-              <a:rPr lang="en-US" altLang="ko-KR" sz="2400" dirty="0">
-                <a:solidFill>
-                  <a:srgbClr val="FF0000"/>
-                </a:solidFill>
-                <a:ea typeface="돋움" panose="020B0600000101010101" pitchFamily="50" charset="-127"/>
-                <a:sym typeface="Wingdings" panose="05000000000000000000" pitchFamily="2" charset="2"/>
-              </a:rPr>
-              <a:t> we focus on elastic scattering here. </a:t>
-            </a:r>
-            <a:endParaRPr lang="en-US" altLang="ko-KR" sz="2400" dirty="0">
-              <a:solidFill>
-                <a:srgbClr val="292934"/>
-              </a:solidFill>
-              <a:latin typeface="Arial"/>
-              <a:ea typeface="돋움" panose="020B0600000101010101" pitchFamily="50" charset="-127"/>
-            </a:endParaRPr>
-          </a:p>
         </p:txBody>
       </p:sp>
       <p:pic>
         <p:nvPicPr>
-          <p:cNvPr id="6" name="그림 5">
-            <a:extLst>
-              <a:ext uri="{FF2B5EF4-FFF2-40B4-BE49-F238E27FC236}">
-                <a16:creationId xmlns:a16="http://schemas.microsoft.com/office/drawing/2014/main" id="{5807920B-F1CA-49E9-AA7E-922112FBAB2F}"/>
+          <p:cNvPr id="9" name="그림 8">
+            <a:extLst>
+              <a:ext uri="{FF2B5EF4-FFF2-40B4-BE49-F238E27FC236}">
+                <a16:creationId xmlns:a16="http://schemas.microsoft.com/office/drawing/2014/main" id="{72EA36EF-8B9E-4817-A85C-A9049684B753}"/>
               </a:ext>
             </a:extLst>
           </p:cNvPr>
@@ -18959,8 +18912,8 @@
         </p:blipFill>
         <p:spPr>
           <a:xfrm>
-            <a:off x="5991483" y="1520040"/>
-            <a:ext cx="5806322" cy="3687580"/>
+            <a:off x="6309731" y="2111717"/>
+            <a:ext cx="4057284" cy="2222956"/>
           </a:xfrm>
           <a:prstGeom prst="rect">
             <a:avLst/>
@@ -18969,10 +18922,10 @@
       </p:pic>
       <p:pic>
         <p:nvPicPr>
-          <p:cNvPr id="2" name="그림 1">
-            <a:extLst>
-              <a:ext uri="{FF2B5EF4-FFF2-40B4-BE49-F238E27FC236}">
-                <a16:creationId xmlns:a16="http://schemas.microsoft.com/office/drawing/2014/main" id="{740F7BC3-EA65-4615-8648-3E9EE41DD295}"/>
+          <p:cNvPr id="10" name="그림 9">
+            <a:extLst>
+              <a:ext uri="{FF2B5EF4-FFF2-40B4-BE49-F238E27FC236}">
+                <a16:creationId xmlns:a16="http://schemas.microsoft.com/office/drawing/2014/main" id="{7743E98F-D255-419E-A584-F7B5CD801FE8}"/>
               </a:ext>
             </a:extLst>
           </p:cNvPr>
@@ -18989,18 +18942,65 @@
         </p:blipFill>
         <p:spPr>
           <a:xfrm>
-            <a:off x="6727259" y="5139442"/>
-            <a:ext cx="4134030" cy="1459533"/>
+            <a:off x="974923" y="3223195"/>
+            <a:ext cx="4344006" cy="866896"/>
           </a:xfrm>
           <a:prstGeom prst="rect">
             <a:avLst/>
           </a:prstGeom>
         </p:spPr>
       </p:pic>
+      <p:sp>
+        <p:nvSpPr>
+          <p:cNvPr id="2" name="TextBox 1">
+            <a:extLst>
+              <a:ext uri="{FF2B5EF4-FFF2-40B4-BE49-F238E27FC236}">
+                <a16:creationId xmlns:a16="http://schemas.microsoft.com/office/drawing/2014/main" id="{3BA95C2C-5026-4851-9C43-D7402446C999}"/>
+              </a:ext>
+            </a:extLst>
+          </p:cNvPr>
+          <p:cNvSpPr txBox="1"/>
+          <p:nvPr/>
+        </p:nvSpPr>
+        <p:spPr>
+          <a:xfrm>
+            <a:off x="923570" y="4958074"/>
+            <a:ext cx="9201737" cy="646331"/>
+          </a:xfrm>
+          <a:prstGeom prst="rect">
+            <a:avLst/>
+          </a:prstGeom>
+          <a:noFill/>
+        </p:spPr>
+        <p:txBody>
+          <a:bodyPr wrap="square" rtlCol="0">
+            <a:spAutoFit/>
+          </a:bodyPr>
+          <a:lstStyle/>
+          <a:p>
+            <a:r>
+              <a:rPr lang="en-US" dirty="0"/>
+              <a:t>Compare with experiments</a:t>
+            </a:r>
+          </a:p>
+          <a:p>
+            <a:r>
+              <a:rPr lang="en-US" dirty="0">
+                <a:sym typeface="Wingdings" panose="05000000000000000000" pitchFamily="2" charset="2"/>
+              </a:rPr>
+              <a:t> </a:t>
+            </a:r>
+            <a:r>
+              <a:rPr lang="en-US" dirty="0"/>
+              <a:t>What kind of interaction and states(structure) describes the experiments best?</a:t>
+            </a:r>
+          </a:p>
+        </p:txBody>
+      </p:sp>
     </p:spTree>
     <p:extLst>
       <p:ext uri="{BB962C8B-B14F-4D97-AF65-F5344CB8AC3E}">
-        <p14:creationId xmlns:p14="http://schemas.microsoft.com/office/powerpoint/2010/main" val="89010064"/>
+        <p14:creationId xmlns:p14="http://schemas.microsoft.com/office/powerpoint/2010/main" val="2305429575"/>
       </p:ext>
     </p:extLst>
   </p:cSld>
